--- a/output_pptx/The_First_Noel.pptx
+++ b/output_pptx/The_First_Noel.pptx
@@ -3114,8 +3114,8 @@
         </p:nvSpPr>
         <p:spPr>
           <a:xfrm>
-            <a:off x="594360" y="2258568"/>
-            <a:ext cx="11002975" cy="685800"/>
+            <a:off x="640080" y="2052828"/>
+            <a:ext cx="10911535" cy="731520"/>
           </a:xfrm>
           <a:prstGeom prst="rect">
             <a:avLst/>
@@ -3130,7 +3130,7 @@
           <a:p>
             <a:pPr algn="ctr"/>
             <a:r>
-              <a:rPr sz="3352" b="1" i="0">
+              <a:rPr sz="3600" b="1" i="0">
                 <a:solidFill>
                   <a:srgbClr val="FFFFFF"/>
                 </a:solidFill>
@@ -3149,8 +3149,8 @@
         </p:nvSpPr>
         <p:spPr>
           <a:xfrm>
-            <a:off x="594360" y="2980944"/>
-            <a:ext cx="11002975" cy="347472"/>
+            <a:off x="640080" y="2985516"/>
+            <a:ext cx="10911535" cy="731520"/>
           </a:xfrm>
           <a:prstGeom prst="rect">
             <a:avLst/>
@@ -3165,83 +3165,13 @@
           <a:p>
             <a:pPr algn="ctr"/>
             <a:r>
-              <a:rPr sz="2200" b="0" i="1">
-                <a:solidFill>
-                  <a:srgbClr val="8C8C8C"/>
-                </a:solidFill>
-                <a:latin typeface="Arial"/>
-              </a:rPr>
-              <a:t/>
-            </a:r>
-          </a:p>
-        </p:txBody>
-      </p:sp>
-      <p:sp>
-        <p:nvSpPr>
-          <p:cNvPr id="4" name="TextBox 3"/>
-          <p:cNvSpPr txBox="1"/>
-          <p:nvPr/>
-        </p:nvSpPr>
-        <p:spPr>
-          <a:xfrm>
-            <a:off x="594360" y="3529584"/>
-            <a:ext cx="11002975" cy="685800"/>
-          </a:xfrm>
-          <a:prstGeom prst="rect">
-            <a:avLst/>
-          </a:prstGeom>
-          <a:noFill/>
-        </p:spPr>
-        <p:txBody>
-          <a:bodyPr wrap="square">
-            <a:spAutoFit/>
-          </a:bodyPr>
-          <a:lstStyle/>
-          <a:p>
-            <a:pPr algn="ctr"/>
-            <a:r>
-              <a:rPr sz="3911" b="1" i="0">
+              <a:rPr sz="4200" b="1" i="0">
                 <a:solidFill>
                   <a:srgbClr val="FFFFFF"/>
                 </a:solidFill>
                 <a:latin typeface="Arial"/>
               </a:rPr>
               <a:t>A uns pobres pastores ao pé de Belém</a:t>
-            </a:r>
-          </a:p>
-        </p:txBody>
-      </p:sp>
-      <p:sp>
-        <p:nvSpPr>
-          <p:cNvPr id="5" name="TextBox 4"/>
-          <p:cNvSpPr txBox="1"/>
-          <p:nvPr/>
-        </p:nvSpPr>
-        <p:spPr>
-          <a:xfrm>
-            <a:off x="594360" y="4251960"/>
-            <a:ext cx="11002975" cy="347472"/>
-          </a:xfrm>
-          <a:prstGeom prst="rect">
-            <a:avLst/>
-          </a:prstGeom>
-          <a:noFill/>
-        </p:spPr>
-        <p:txBody>
-          <a:bodyPr wrap="square">
-            <a:spAutoFit/>
-          </a:bodyPr>
-          <a:lstStyle/>
-          <a:p>
-            <a:pPr algn="ctr"/>
-            <a:r>
-              <a:rPr sz="2200" b="0" i="1">
-                <a:solidFill>
-                  <a:srgbClr val="8C8C8C"/>
-                </a:solidFill>
-                <a:latin typeface="Arial"/>
-              </a:rPr>
-              <a:t/>
             </a:r>
           </a:p>
         </p:txBody>
@@ -3280,8 +3210,8 @@
         </p:nvSpPr>
         <p:spPr>
           <a:xfrm>
-            <a:off x="594360" y="2258568"/>
-            <a:ext cx="11002975" cy="685800"/>
+            <a:off x="640080" y="2052828"/>
+            <a:ext cx="10911535" cy="731520"/>
           </a:xfrm>
           <a:prstGeom prst="rect">
             <a:avLst/>
@@ -3296,7 +3226,7 @@
           <a:p>
             <a:pPr algn="ctr"/>
             <a:r>
-              <a:rPr sz="3520" b="1" i="0">
+              <a:rPr sz="3800" b="1" i="0">
                 <a:solidFill>
                   <a:srgbClr val="FFFFFF"/>
                 </a:solidFill>
@@ -3315,8 +3245,8 @@
         </p:nvSpPr>
         <p:spPr>
           <a:xfrm>
-            <a:off x="594360" y="2980944"/>
-            <a:ext cx="11002975" cy="347472"/>
+            <a:off x="640080" y="2985516"/>
+            <a:ext cx="10911535" cy="731520"/>
           </a:xfrm>
           <a:prstGeom prst="rect">
             <a:avLst/>
@@ -3331,83 +3261,13 @@
           <a:p>
             <a:pPr algn="ctr"/>
             <a:r>
-              <a:rPr sz="2200" b="0" i="1">
-                <a:solidFill>
-                  <a:srgbClr val="8C8C8C"/>
-                </a:solidFill>
-                <a:latin typeface="Arial"/>
-              </a:rPr>
-              <a:t/>
-            </a:r>
-          </a:p>
-        </p:txBody>
-      </p:sp>
-      <p:sp>
-        <p:nvSpPr>
-          <p:cNvPr id="4" name="TextBox 3"/>
-          <p:cNvSpPr txBox="1"/>
-          <p:nvPr/>
-        </p:nvSpPr>
-        <p:spPr>
-          <a:xfrm>
-            <a:off x="594360" y="3529584"/>
-            <a:ext cx="11002975" cy="685800"/>
-          </a:xfrm>
-          <a:prstGeom prst="rect">
-            <a:avLst/>
-          </a:prstGeom>
-          <a:noFill/>
-        </p:spPr>
-        <p:txBody>
-          <a:bodyPr wrap="square">
-            <a:spAutoFit/>
-          </a:bodyPr>
-          <a:lstStyle/>
-          <a:p>
-            <a:pPr algn="ctr"/>
-            <a:r>
-              <a:rPr sz="3274" b="1" i="0">
+              <a:rPr sz="3500" b="1" i="0">
                 <a:solidFill>
                   <a:srgbClr val="FFFFFF"/>
                 </a:solidFill>
                 <a:latin typeface="Arial"/>
               </a:rPr>
               <a:t>Veio à terra forte luz, que do céu lhe caiu</a:t>
-            </a:r>
-          </a:p>
-        </p:txBody>
-      </p:sp>
-      <p:sp>
-        <p:nvSpPr>
-          <p:cNvPr id="5" name="TextBox 4"/>
-          <p:cNvSpPr txBox="1"/>
-          <p:nvPr/>
-        </p:nvSpPr>
-        <p:spPr>
-          <a:xfrm>
-            <a:off x="594360" y="4251960"/>
-            <a:ext cx="11002975" cy="347472"/>
-          </a:xfrm>
-          <a:prstGeom prst="rect">
-            <a:avLst/>
-          </a:prstGeom>
-          <a:noFill/>
-        </p:spPr>
-        <p:txBody>
-          <a:bodyPr wrap="square">
-            <a:spAutoFit/>
-          </a:bodyPr>
-          <a:lstStyle/>
-          <a:p>
-            <a:pPr algn="ctr"/>
-            <a:r>
-              <a:rPr sz="2200" b="0" i="1">
-                <a:solidFill>
-                  <a:srgbClr val="8C8C8C"/>
-                </a:solidFill>
-                <a:latin typeface="Arial"/>
-              </a:rPr>
-              <a:t/>
             </a:r>
           </a:p>
         </p:txBody>
@@ -3446,8 +3306,8 @@
         </p:nvSpPr>
         <p:spPr>
           <a:xfrm>
-            <a:off x="594360" y="2258568"/>
-            <a:ext cx="11002975" cy="685800"/>
+            <a:off x="640080" y="2052828"/>
+            <a:ext cx="10911535" cy="731520"/>
           </a:xfrm>
           <a:prstGeom prst="rect">
             <a:avLst/>
@@ -3462,7 +3322,7 @@
           <a:p>
             <a:pPr algn="ctr"/>
             <a:r>
-              <a:rPr sz="3274" b="1" i="0">
+              <a:rPr sz="3500" b="1" i="0">
                 <a:solidFill>
                   <a:srgbClr val="FFFFFF"/>
                 </a:solidFill>
@@ -3481,8 +3341,8 @@
         </p:nvSpPr>
         <p:spPr>
           <a:xfrm>
-            <a:off x="594360" y="2980944"/>
-            <a:ext cx="11002975" cy="347472"/>
+            <a:off x="640080" y="2985516"/>
+            <a:ext cx="10911535" cy="731520"/>
           </a:xfrm>
           <a:prstGeom prst="rect">
             <a:avLst/>
@@ -3497,83 +3357,13 @@
           <a:p>
             <a:pPr algn="ctr"/>
             <a:r>
-              <a:rPr sz="2200" b="0" i="1">
-                <a:solidFill>
-                  <a:srgbClr val="8C8C8C"/>
-                </a:solidFill>
-                <a:latin typeface="Arial"/>
-              </a:rPr>
-              <a:t/>
-            </a:r>
-          </a:p>
-        </p:txBody>
-      </p:sp>
-      <p:sp>
-        <p:nvSpPr>
-          <p:cNvPr id="4" name="TextBox 3"/>
-          <p:cNvSpPr txBox="1"/>
-          <p:nvPr/>
-        </p:nvSpPr>
-        <p:spPr>
-          <a:xfrm>
-            <a:off x="594360" y="3529584"/>
-            <a:ext cx="11002975" cy="685800"/>
-          </a:xfrm>
-          <a:prstGeom prst="rect">
-            <a:avLst/>
-          </a:prstGeom>
-          <a:noFill/>
-        </p:spPr>
-        <p:txBody>
-          <a:bodyPr wrap="square">
-            <a:spAutoFit/>
-          </a:bodyPr>
-          <a:lstStyle/>
-          <a:p>
-            <a:pPr algn="ctr"/>
-            <a:r>
-              <a:rPr sz="4400" b="1" i="0">
+              <a:rPr sz="4800" b="1" i="0">
                 <a:solidFill>
                   <a:srgbClr val="FFFFFF"/>
                 </a:solidFill>
                 <a:latin typeface="Arial"/>
               </a:rPr>
               <a:t>Natal! Natal! Natal! Natal!</a:t>
-            </a:r>
-          </a:p>
-        </p:txBody>
-      </p:sp>
-      <p:sp>
-        <p:nvSpPr>
-          <p:cNvPr id="5" name="TextBox 4"/>
-          <p:cNvSpPr txBox="1"/>
-          <p:nvPr/>
-        </p:nvSpPr>
-        <p:spPr>
-          <a:xfrm>
-            <a:off x="594360" y="4251960"/>
-            <a:ext cx="11002975" cy="347472"/>
-          </a:xfrm>
-          <a:prstGeom prst="rect">
-            <a:avLst/>
-          </a:prstGeom>
-          <a:noFill/>
-        </p:spPr>
-        <p:txBody>
-          <a:bodyPr wrap="square">
-            <a:spAutoFit/>
-          </a:bodyPr>
-          <a:lstStyle/>
-          <a:p>
-            <a:pPr algn="ctr"/>
-            <a:r>
-              <a:rPr sz="2200" b="0" i="1">
-                <a:solidFill>
-                  <a:srgbClr val="8C8C8C"/>
-                </a:solidFill>
-                <a:latin typeface="Arial"/>
-              </a:rPr>
-              <a:t/>
             </a:r>
           </a:p>
         </p:txBody>
@@ -3612,8 +3402,8 @@
         </p:nvSpPr>
         <p:spPr>
           <a:xfrm>
-            <a:off x="594360" y="2258568"/>
-            <a:ext cx="11002975" cy="685800"/>
+            <a:off x="640080" y="2052828"/>
+            <a:ext cx="10911535" cy="731520"/>
           </a:xfrm>
           <a:prstGeom prst="rect">
             <a:avLst/>
@@ -3628,7 +3418,7 @@
           <a:p>
             <a:pPr algn="ctr"/>
             <a:r>
-              <a:rPr sz="3200" b="1" i="0">
+              <a:rPr sz="3400" b="1" i="0">
                 <a:solidFill>
                   <a:srgbClr val="FFFFFF"/>
                 </a:solidFill>
@@ -3647,8 +3437,8 @@
         </p:nvSpPr>
         <p:spPr>
           <a:xfrm>
-            <a:off x="594360" y="2980944"/>
-            <a:ext cx="11002975" cy="347472"/>
+            <a:off x="640080" y="2985516"/>
+            <a:ext cx="10911535" cy="731520"/>
           </a:xfrm>
           <a:prstGeom prst="rect">
             <a:avLst/>
@@ -3663,83 +3453,13 @@
           <a:p>
             <a:pPr algn="ctr"/>
             <a:r>
-              <a:rPr sz="2200" b="0" i="1">
-                <a:solidFill>
-                  <a:srgbClr val="8C8C8C"/>
-                </a:solidFill>
-                <a:latin typeface="Arial"/>
-              </a:rPr>
-              <a:t/>
-            </a:r>
-          </a:p>
-        </p:txBody>
-      </p:sp>
-      <p:sp>
-        <p:nvSpPr>
-          <p:cNvPr id="4" name="TextBox 3"/>
-          <p:cNvSpPr txBox="1"/>
-          <p:nvPr/>
-        </p:nvSpPr>
-        <p:spPr>
-          <a:xfrm>
-            <a:off x="594360" y="3529584"/>
-            <a:ext cx="11002975" cy="685800"/>
-          </a:xfrm>
-          <a:prstGeom prst="rect">
-            <a:avLst/>
-          </a:prstGeom>
-          <a:noFill/>
-        </p:spPr>
-        <p:txBody>
-          <a:bodyPr wrap="square">
-            <a:spAutoFit/>
-          </a:bodyPr>
-          <a:lstStyle/>
-          <a:p>
-            <a:pPr algn="ctr"/>
-            <a:r>
-              <a:rPr sz="4022" b="1" i="0">
+              <a:rPr sz="4300" b="1" i="0">
                 <a:solidFill>
                   <a:srgbClr val="FFFFFF"/>
                 </a:solidFill>
                 <a:latin typeface="Arial"/>
               </a:rPr>
               <a:t>Suportavam, da noite, o frio também</a:t>
-            </a:r>
-          </a:p>
-        </p:txBody>
-      </p:sp>
-      <p:sp>
-        <p:nvSpPr>
-          <p:cNvPr id="5" name="TextBox 4"/>
-          <p:cNvSpPr txBox="1"/>
-          <p:nvPr/>
-        </p:nvSpPr>
-        <p:spPr>
-          <a:xfrm>
-            <a:off x="594360" y="4251960"/>
-            <a:ext cx="11002975" cy="347472"/>
-          </a:xfrm>
-          <a:prstGeom prst="rect">
-            <a:avLst/>
-          </a:prstGeom>
-          <a:noFill/>
-        </p:spPr>
-        <p:txBody>
-          <a:bodyPr wrap="square">
-            <a:spAutoFit/>
-          </a:bodyPr>
-          <a:lstStyle/>
-          <a:p>
-            <a:pPr algn="ctr"/>
-            <a:r>
-              <a:rPr sz="2200" b="0" i="1">
-                <a:solidFill>
-                  <a:srgbClr val="8C8C8C"/>
-                </a:solidFill>
-                <a:latin typeface="Arial"/>
-              </a:rPr>
-              <a:t/>
             </a:r>
           </a:p>
         </p:txBody>
@@ -3778,8 +3498,8 @@
         </p:nvSpPr>
         <p:spPr>
           <a:xfrm>
-            <a:off x="594360" y="2258568"/>
-            <a:ext cx="11002975" cy="685800"/>
+            <a:off x="640080" y="2052828"/>
+            <a:ext cx="10911535" cy="731520"/>
           </a:xfrm>
           <a:prstGeom prst="rect">
             <a:avLst/>
@@ -3794,7 +3514,7 @@
           <a:p>
             <a:pPr algn="ctr"/>
             <a:r>
-              <a:rPr sz="4400" b="1" i="0">
+              <a:rPr sz="4800" b="1" i="0">
                 <a:solidFill>
                   <a:srgbClr val="FFFFFF"/>
                 </a:solidFill>
@@ -3813,8 +3533,8 @@
         </p:nvSpPr>
         <p:spPr>
           <a:xfrm>
-            <a:off x="594360" y="2980944"/>
-            <a:ext cx="11002975" cy="347472"/>
+            <a:off x="640080" y="2985516"/>
+            <a:ext cx="10911535" cy="731520"/>
           </a:xfrm>
           <a:prstGeom prst="rect">
             <a:avLst/>
@@ -3829,83 +3549,13 @@
           <a:p>
             <a:pPr algn="ctr"/>
             <a:r>
-              <a:rPr sz="2200" b="0" i="1">
-                <a:solidFill>
-                  <a:srgbClr val="8C8C8C"/>
-                </a:solidFill>
-                <a:latin typeface="Arial"/>
-              </a:rPr>
-              <a:t/>
-            </a:r>
-          </a:p>
-        </p:txBody>
-      </p:sp>
-      <p:sp>
-        <p:nvSpPr>
-          <p:cNvPr id="4" name="TextBox 3"/>
-          <p:cNvSpPr txBox="1"/>
-          <p:nvPr/>
-        </p:nvSpPr>
-        <p:spPr>
-          <a:xfrm>
-            <a:off x="594360" y="3529584"/>
-            <a:ext cx="11002975" cy="685800"/>
-          </a:xfrm>
-          <a:prstGeom prst="rect">
-            <a:avLst/>
-          </a:prstGeom>
-          <a:noFill/>
-        </p:spPr>
-        <p:txBody>
-          <a:bodyPr wrap="square">
-            <a:spAutoFit/>
-          </a:bodyPr>
-          <a:lstStyle/>
-          <a:p>
-            <a:pPr algn="ctr"/>
-            <a:r>
-              <a:rPr sz="4400" b="1" i="0">
+              <a:rPr sz="4800" b="1" i="0">
                 <a:solidFill>
                   <a:srgbClr val="FFFFFF"/>
                 </a:solidFill>
                 <a:latin typeface="Arial"/>
               </a:rPr>
               <a:t>É vindo ao mundo o Rei Divinal!</a:t>
-            </a:r>
-          </a:p>
-        </p:txBody>
-      </p:sp>
-      <p:sp>
-        <p:nvSpPr>
-          <p:cNvPr id="5" name="TextBox 4"/>
-          <p:cNvSpPr txBox="1"/>
-          <p:nvPr/>
-        </p:nvSpPr>
-        <p:spPr>
-          <a:xfrm>
-            <a:off x="594360" y="4251960"/>
-            <a:ext cx="11002975" cy="347472"/>
-          </a:xfrm>
-          <a:prstGeom prst="rect">
-            <a:avLst/>
-          </a:prstGeom>
-          <a:noFill/>
-        </p:spPr>
-        <p:txBody>
-          <a:bodyPr wrap="square">
-            <a:spAutoFit/>
-          </a:bodyPr>
-          <a:lstStyle/>
-          <a:p>
-            <a:pPr algn="ctr"/>
-            <a:r>
-              <a:rPr sz="2200" b="0" i="1">
-                <a:solidFill>
-                  <a:srgbClr val="8C8C8C"/>
-                </a:solidFill>
-                <a:latin typeface="Arial"/>
-              </a:rPr>
-              <a:t/>
             </a:r>
           </a:p>
         </p:txBody>
@@ -3944,8 +3594,8 @@
         </p:nvSpPr>
         <p:spPr>
           <a:xfrm>
-            <a:off x="594360" y="1837944"/>
-            <a:ext cx="11002975" cy="685800"/>
+            <a:off x="640080" y="1650492"/>
+            <a:ext cx="10911535" cy="731520"/>
           </a:xfrm>
           <a:prstGeom prst="rect">
             <a:avLst/>
@@ -3960,7 +3610,7 @@
           <a:p>
             <a:pPr algn="ctr"/>
             <a:r>
-              <a:rPr sz="3300" b="1" i="0">
+              <a:rPr sz="3600" b="1" i="0">
                 <a:solidFill>
                   <a:srgbClr val="FFFFFF"/>
                 </a:solidFill>
@@ -3979,8 +3629,8 @@
         </p:nvSpPr>
         <p:spPr>
           <a:xfrm>
-            <a:off x="594360" y="2560320"/>
-            <a:ext cx="11002975" cy="384048"/>
+            <a:off x="640080" y="2418588"/>
+            <a:ext cx="10911535" cy="365760"/>
           </a:xfrm>
           <a:prstGeom prst="rect">
             <a:avLst/>
@@ -3995,9 +3645,9 @@
           <a:p>
             <a:pPr algn="ctr"/>
             <a:r>
-              <a:rPr sz="1976" b="0" i="1">
-                <a:solidFill>
-                  <a:srgbClr val="B4B4B4"/>
+              <a:rPr sz="2400" b="0" i="1">
+                <a:solidFill>
+                  <a:srgbClr val="AAAAAA"/>
                 </a:solidFill>
                 <a:latin typeface="Arial"/>
               </a:rPr>
@@ -4014,8 +3664,8 @@
         </p:nvSpPr>
         <p:spPr>
           <a:xfrm>
-            <a:off x="594360" y="2980944"/>
-            <a:ext cx="11002975" cy="347472"/>
+            <a:off x="640080" y="2985516"/>
+            <a:ext cx="10911535" cy="731520"/>
           </a:xfrm>
           <a:prstGeom prst="rect">
             <a:avLst/>
@@ -4030,13 +3680,13 @@
           <a:p>
             <a:pPr algn="ctr"/>
             <a:r>
-              <a:rPr sz="2000" b="0" i="1">
-                <a:solidFill>
-                  <a:srgbClr val="8C8C8C"/>
+              <a:rPr sz="3200" b="1" i="0">
+                <a:solidFill>
+                  <a:srgbClr val="FFFFFF"/>
                 </a:solidFill>
                 <a:latin typeface="Arial"/>
               </a:rPr>
-              <a:t/>
+              <a:t>イスラエルの王 探しに --&gt;          星にみちびかれてきた</a:t>
             </a:r>
           </a:p>
         </p:txBody>
@@ -4049,8 +3699,8 @@
         </p:nvSpPr>
         <p:spPr>
           <a:xfrm>
-            <a:off x="594360" y="3529584"/>
-            <a:ext cx="11002975" cy="685800"/>
+            <a:off x="640080" y="3753612"/>
+            <a:ext cx="10911535" cy="365760"/>
           </a:xfrm>
           <a:prstGeom prst="rect">
             <a:avLst/>
@@ -4065,13 +3715,13 @@
           <a:p>
             <a:pPr algn="ctr"/>
             <a:r>
-              <a:rPr sz="3017" b="1" i="0">
-                <a:solidFill>
-                  <a:srgbClr val="FFFFFF"/>
+              <a:rPr sz="2100" b="0" i="1">
+                <a:solidFill>
+                  <a:srgbClr val="AAAAAA"/>
                 </a:solidFill>
                 <a:latin typeface="Arial"/>
               </a:rPr>
-              <a:t>イスラエルの王 探しに --&gt;          星にみちびかれてきた</a:t>
+              <a:t>Isuraeruno Ou  Sagashini,        Hoshini Michibikarete Kita</a:t>
             </a:r>
           </a:p>
         </p:txBody>
@@ -4084,8 +3734,8 @@
         </p:nvSpPr>
         <p:spPr>
           <a:xfrm>
-            <a:off x="594360" y="4251960"/>
-            <a:ext cx="11002975" cy="384048"/>
+            <a:off x="640080" y="4530852"/>
+            <a:ext cx="10911535" cy="310896"/>
           </a:xfrm>
           <a:prstGeom prst="rect">
             <a:avLst/>
@@ -4100,13 +3750,13 @@
           <a:p>
             <a:pPr algn="ctr"/>
             <a:r>
-              <a:rPr sz="1708" b="0" i="1">
-                <a:solidFill>
-                  <a:srgbClr val="B4B4B4"/>
+              <a:rPr sz="2000" b="0" i="1">
+                <a:solidFill>
+                  <a:srgbClr val="828282"/>
                 </a:solidFill>
                 <a:latin typeface="Arial"/>
               </a:rPr>
-              <a:t>Isuraeruno Ou  Sagashini,        Hoshini Michibikarete Kita</a:t>
+              <a:t>Eis que um anjo proclamou o primeiro Natal</a:t>
             </a:r>
           </a:p>
         </p:txBody>
@@ -4119,8 +3769,8 @@
         </p:nvSpPr>
         <p:spPr>
           <a:xfrm>
-            <a:off x="594360" y="4672584"/>
-            <a:ext cx="11002975" cy="347472"/>
+            <a:off x="640080" y="4896612"/>
+            <a:ext cx="10911535" cy="310896"/>
           </a:xfrm>
           <a:prstGeom prst="rect">
             <a:avLst/>
@@ -4137,11 +3787,11 @@
             <a:r>
               <a:rPr sz="2000" b="0" i="1">
                 <a:solidFill>
-                  <a:srgbClr val="8C8C8C"/>
+                  <a:srgbClr val="828282"/>
                 </a:solidFill>
                 <a:latin typeface="Arial"/>
               </a:rPr>
-              <a:t/>
+              <a:t>A uns pobres pastores ao pé de Belém</a:t>
             </a:r>
           </a:p>
         </p:txBody>
@@ -4180,8 +3830,8 @@
         </p:nvSpPr>
         <p:spPr>
           <a:xfrm>
-            <a:off x="594360" y="1837944"/>
-            <a:ext cx="11002975" cy="685800"/>
+            <a:off x="640080" y="1650492"/>
+            <a:ext cx="10911535" cy="731520"/>
           </a:xfrm>
           <a:prstGeom prst="rect">
             <a:avLst/>
@@ -4196,7 +3846,7 @@
           <a:p>
             <a:pPr algn="ctr"/>
             <a:r>
-              <a:rPr sz="4400" b="1" i="0">
+              <a:rPr sz="4800" b="1" i="0">
                 <a:solidFill>
                   <a:srgbClr val="FFFFFF"/>
                 </a:solidFill>
@@ -4215,8 +3865,8 @@
         </p:nvSpPr>
         <p:spPr>
           <a:xfrm>
-            <a:off x="594360" y="2560320"/>
-            <a:ext cx="11002975" cy="384048"/>
+            <a:off x="640080" y="2418588"/>
+            <a:ext cx="10911535" cy="365760"/>
           </a:xfrm>
           <a:prstGeom prst="rect">
             <a:avLst/>
@@ -4233,7 +3883,7 @@
             <a:r>
               <a:rPr sz="2400" b="0" i="1">
                 <a:solidFill>
-                  <a:srgbClr val="B4B4B4"/>
+                  <a:srgbClr val="AAAAAA"/>
                 </a:solidFill>
                 <a:latin typeface="Arial"/>
               </a:rPr>
@@ -4250,8 +3900,8 @@
         </p:nvSpPr>
         <p:spPr>
           <a:xfrm>
-            <a:off x="594360" y="2980944"/>
-            <a:ext cx="11002975" cy="347472"/>
+            <a:off x="640080" y="2985516"/>
+            <a:ext cx="10911535" cy="731520"/>
           </a:xfrm>
           <a:prstGeom prst="rect">
             <a:avLst/>
@@ -4266,13 +3916,13 @@
           <a:p>
             <a:pPr algn="ctr"/>
             <a:r>
-              <a:rPr sz="2000" b="0" i="1">
-                <a:solidFill>
-                  <a:srgbClr val="8C8C8C"/>
+              <a:rPr sz="4800" b="1" i="0">
+                <a:solidFill>
+                  <a:srgbClr val="FFFFFF"/>
                 </a:solidFill>
                 <a:latin typeface="Arial"/>
               </a:rPr>
-              <a:t/>
+              <a:t>王なる子が生まれた</a:t>
             </a:r>
           </a:p>
         </p:txBody>
@@ -4285,8 +3935,8 @@
         </p:nvSpPr>
         <p:spPr>
           <a:xfrm>
-            <a:off x="594360" y="3529584"/>
-            <a:ext cx="11002975" cy="685800"/>
+            <a:off x="640080" y="3753612"/>
+            <a:ext cx="10911535" cy="365760"/>
           </a:xfrm>
           <a:prstGeom prst="rect">
             <a:avLst/>
@@ -4301,13 +3951,13 @@
           <a:p>
             <a:pPr algn="ctr"/>
             <a:r>
-              <a:rPr sz="4400" b="1" i="0">
-                <a:solidFill>
-                  <a:srgbClr val="FFFFFF"/>
+              <a:rPr sz="2400" b="0" i="1">
+                <a:solidFill>
+                  <a:srgbClr val="AAAAAA"/>
                 </a:solidFill>
                 <a:latin typeface="Arial"/>
               </a:rPr>
-              <a:t>王なる子が生まれた</a:t>
+              <a:t>Ounaru Koga Umareta</a:t>
             </a:r>
           </a:p>
         </p:txBody>
@@ -4320,8 +3970,8 @@
         </p:nvSpPr>
         <p:spPr>
           <a:xfrm>
-            <a:off x="594360" y="4251960"/>
-            <a:ext cx="11002975" cy="384048"/>
+            <a:off x="640080" y="4530852"/>
+            <a:ext cx="10911535" cy="310896"/>
           </a:xfrm>
           <a:prstGeom prst="rect">
             <a:avLst/>
@@ -4336,13 +3986,13 @@
           <a:p>
             <a:pPr algn="ctr"/>
             <a:r>
-              <a:rPr sz="2400" b="0" i="1">
-                <a:solidFill>
-                  <a:srgbClr val="B4B4B4"/>
+              <a:rPr sz="2000" b="0" i="1">
+                <a:solidFill>
+                  <a:srgbClr val="828282"/>
                 </a:solidFill>
                 <a:latin typeface="Arial"/>
               </a:rPr>
-              <a:t>Ounaru Koga Umareta</a:t>
+              <a:t>Que nos campos a guardar seu rebanho, afinal</a:t>
             </a:r>
           </a:p>
         </p:txBody>
@@ -4355,8 +4005,8 @@
         </p:nvSpPr>
         <p:spPr>
           <a:xfrm>
-            <a:off x="594360" y="4672584"/>
-            <a:ext cx="11002975" cy="347472"/>
+            <a:off x="640080" y="4896612"/>
+            <a:ext cx="10911535" cy="310896"/>
           </a:xfrm>
           <a:prstGeom prst="rect">
             <a:avLst/>
@@ -4373,11 +4023,11 @@
             <a:r>
               <a:rPr sz="2000" b="0" i="1">
                 <a:solidFill>
-                  <a:srgbClr val="8C8C8C"/>
+                  <a:srgbClr val="828282"/>
                 </a:solidFill>
                 <a:latin typeface="Arial"/>
               </a:rPr>
-              <a:t/>
+              <a:t>Suportavam, da noite, o frio também</a:t>
             </a:r>
           </a:p>
         </p:txBody>
@@ -4416,8 +4066,8 @@
         </p:nvSpPr>
         <p:spPr>
           <a:xfrm>
-            <a:off x="594360" y="1837944"/>
-            <a:ext cx="11002975" cy="685800"/>
+            <a:off x="640080" y="1650492"/>
+            <a:ext cx="10911535" cy="731520"/>
           </a:xfrm>
           <a:prstGeom prst="rect">
             <a:avLst/>
@@ -4432,7 +4082,7 @@
           <a:p>
             <a:pPr algn="ctr"/>
             <a:r>
-              <a:rPr sz="2854" b="1" i="0">
+              <a:rPr sz="3100" b="1" i="0">
                 <a:solidFill>
                   <a:srgbClr val="FFFFFF"/>
                 </a:solidFill>
@@ -4451,8 +4101,8 @@
         </p:nvSpPr>
         <p:spPr>
           <a:xfrm>
-            <a:off x="594360" y="2560320"/>
-            <a:ext cx="11002975" cy="384048"/>
+            <a:off x="640080" y="2418588"/>
+            <a:ext cx="10911535" cy="365760"/>
           </a:xfrm>
           <a:prstGeom prst="rect">
             <a:avLst/>
@@ -4467,9 +4117,9 @@
           <a:p>
             <a:pPr algn="ctr"/>
             <a:r>
-              <a:rPr sz="1708" b="0" i="1">
-                <a:solidFill>
-                  <a:srgbClr val="B4B4B4"/>
+              <a:rPr sz="2100" b="0" i="1">
+                <a:solidFill>
+                  <a:srgbClr val="AAAAAA"/>
                 </a:solidFill>
                 <a:latin typeface="Arial"/>
               </a:rPr>
@@ -4486,8 +4136,8 @@
         </p:nvSpPr>
         <p:spPr>
           <a:xfrm>
-            <a:off x="594360" y="2980944"/>
-            <a:ext cx="11002975" cy="347472"/>
+            <a:off x="640080" y="2985516"/>
+            <a:ext cx="10911535" cy="731520"/>
           </a:xfrm>
           <a:prstGeom prst="rect">
             <a:avLst/>
@@ -4502,13 +4152,13 @@
           <a:p>
             <a:pPr algn="ctr"/>
             <a:r>
-              <a:rPr sz="2000" b="0" i="1">
-                <a:solidFill>
-                  <a:srgbClr val="8C8C8C"/>
+              <a:rPr sz="2900" b="1" i="0">
+                <a:solidFill>
+                  <a:srgbClr val="FFFFFF"/>
                 </a:solidFill>
                 <a:latin typeface="Arial"/>
               </a:rPr>
-              <a:t/>
+              <a:t>宝の箱を差し出して  --&gt;               彼らは御子をあがめた</a:t>
             </a:r>
           </a:p>
         </p:txBody>
@@ -4521,8 +4171,8 @@
         </p:nvSpPr>
         <p:spPr>
           <a:xfrm>
-            <a:off x="594360" y="3529584"/>
-            <a:ext cx="11002975" cy="685800"/>
+            <a:off x="640080" y="3753612"/>
+            <a:ext cx="10911535" cy="365760"/>
           </a:xfrm>
           <a:prstGeom prst="rect">
             <a:avLst/>
@@ -4537,13 +4187,13 @@
           <a:p>
             <a:pPr algn="ctr"/>
             <a:r>
-              <a:rPr sz="2707" b="1" i="0">
-                <a:solidFill>
-                  <a:srgbClr val="FFFFFF"/>
+              <a:rPr sz="2100" b="0" i="1">
+                <a:solidFill>
+                  <a:srgbClr val="AAAAAA"/>
                 </a:solidFill>
                 <a:latin typeface="Arial"/>
               </a:rPr>
-              <a:t>宝の箱を差し出して  --&gt;               彼らは御子をあがめた</a:t>
+              <a:t>Takarano Hakowo Sashidashite,      Kareraha Mikowo Agameta</a:t>
             </a:r>
           </a:p>
         </p:txBody>
@@ -4556,8 +4206,8 @@
         </p:nvSpPr>
         <p:spPr>
           <a:xfrm>
-            <a:off x="594360" y="4251960"/>
-            <a:ext cx="11002975" cy="384048"/>
+            <a:off x="640080" y="4530852"/>
+            <a:ext cx="10911535" cy="310896"/>
           </a:xfrm>
           <a:prstGeom prst="rect">
             <a:avLst/>
@@ -4572,13 +4222,13 @@
           <a:p>
             <a:pPr algn="ctr"/>
             <a:r>
-              <a:rPr sz="1737" b="0" i="1">
-                <a:solidFill>
-                  <a:srgbClr val="B4B4B4"/>
+              <a:rPr sz="2000" b="0" i="1">
+                <a:solidFill>
+                  <a:srgbClr val="828282"/>
                 </a:solidFill>
                 <a:latin typeface="Arial"/>
               </a:rPr>
-              <a:t>Takarano Hakowo Sashidashite,      Kareraha Mikowo Agameta</a:t>
+              <a:t>Eis que um anjo proclamou o primeiro Natal</a:t>
             </a:r>
           </a:p>
         </p:txBody>
@@ -4591,8 +4241,8 @@
         </p:nvSpPr>
         <p:spPr>
           <a:xfrm>
-            <a:off x="594360" y="4672584"/>
-            <a:ext cx="11002975" cy="347472"/>
+            <a:off x="640080" y="4896612"/>
+            <a:ext cx="10911535" cy="310896"/>
           </a:xfrm>
           <a:prstGeom prst="rect">
             <a:avLst/>
@@ -4609,11 +4259,11 @@
             <a:r>
               <a:rPr sz="2000" b="0" i="1">
                 <a:solidFill>
-                  <a:srgbClr val="8C8C8C"/>
+                  <a:srgbClr val="828282"/>
                 </a:solidFill>
                 <a:latin typeface="Arial"/>
               </a:rPr>
-              <a:t/>
+              <a:t>A uns pobres pastores ao pé de Belém</a:t>
             </a:r>
           </a:p>
         </p:txBody>
@@ -4652,8 +4302,8 @@
         </p:nvSpPr>
         <p:spPr>
           <a:xfrm>
-            <a:off x="594360" y="1837944"/>
-            <a:ext cx="11002975" cy="685800"/>
+            <a:off x="640080" y="1650492"/>
+            <a:ext cx="10911535" cy="731520"/>
           </a:xfrm>
           <a:prstGeom prst="rect">
             <a:avLst/>
@@ -4668,7 +4318,7 @@
           <a:p>
             <a:pPr algn="ctr"/>
             <a:r>
-              <a:rPr sz="4400" b="1" i="0">
+              <a:rPr sz="4800" b="1" i="0">
                 <a:solidFill>
                   <a:srgbClr val="FFFFFF"/>
                 </a:solidFill>
@@ -4687,8 +4337,8 @@
         </p:nvSpPr>
         <p:spPr>
           <a:xfrm>
-            <a:off x="594360" y="2560320"/>
-            <a:ext cx="11002975" cy="384048"/>
+            <a:off x="640080" y="2418588"/>
+            <a:ext cx="10911535" cy="365760"/>
           </a:xfrm>
           <a:prstGeom prst="rect">
             <a:avLst/>
@@ -4705,7 +4355,7 @@
             <a:r>
               <a:rPr sz="2400" b="0" i="1">
                 <a:solidFill>
-                  <a:srgbClr val="B4B4B4"/>
+                  <a:srgbClr val="AAAAAA"/>
                 </a:solidFill>
                 <a:latin typeface="Arial"/>
               </a:rPr>
@@ -4722,8 +4372,8 @@
         </p:nvSpPr>
         <p:spPr>
           <a:xfrm>
-            <a:off x="594360" y="2980944"/>
-            <a:ext cx="11002975" cy="347472"/>
+            <a:off x="640080" y="2985516"/>
+            <a:ext cx="10911535" cy="731520"/>
           </a:xfrm>
           <a:prstGeom prst="rect">
             <a:avLst/>
@@ -4738,13 +4388,13 @@
           <a:p>
             <a:pPr algn="ctr"/>
             <a:r>
-              <a:rPr sz="2000" b="0" i="1">
-                <a:solidFill>
-                  <a:srgbClr val="8C8C8C"/>
+              <a:rPr sz="4800" b="1" i="0">
+                <a:solidFill>
+                  <a:srgbClr val="FFFFFF"/>
                 </a:solidFill>
                 <a:latin typeface="Arial"/>
               </a:rPr>
-              <a:t/>
+              <a:t>王なる子が生まれた</a:t>
             </a:r>
           </a:p>
         </p:txBody>
@@ -4757,8 +4407,8 @@
         </p:nvSpPr>
         <p:spPr>
           <a:xfrm>
-            <a:off x="594360" y="3529584"/>
-            <a:ext cx="11002975" cy="685800"/>
+            <a:off x="640080" y="3753612"/>
+            <a:ext cx="10911535" cy="365760"/>
           </a:xfrm>
           <a:prstGeom prst="rect">
             <a:avLst/>
@@ -4773,13 +4423,13 @@
           <a:p>
             <a:pPr algn="ctr"/>
             <a:r>
-              <a:rPr sz="4400" b="1" i="0">
-                <a:solidFill>
-                  <a:srgbClr val="FFFFFF"/>
+              <a:rPr sz="2400" b="0" i="1">
+                <a:solidFill>
+                  <a:srgbClr val="AAAAAA"/>
                 </a:solidFill>
                 <a:latin typeface="Arial"/>
               </a:rPr>
-              <a:t>王なる子が生まれた</a:t>
+              <a:t>Ounaru Koga Umareta</a:t>
             </a:r>
           </a:p>
         </p:txBody>
@@ -4792,8 +4442,8 @@
         </p:nvSpPr>
         <p:spPr>
           <a:xfrm>
-            <a:off x="594360" y="4251960"/>
-            <a:ext cx="11002975" cy="384048"/>
+            <a:off x="640080" y="4530852"/>
+            <a:ext cx="10911535" cy="310896"/>
           </a:xfrm>
           <a:prstGeom prst="rect">
             <a:avLst/>
@@ -4808,13 +4458,13 @@
           <a:p>
             <a:pPr algn="ctr"/>
             <a:r>
-              <a:rPr sz="2400" b="0" i="1">
-                <a:solidFill>
-                  <a:srgbClr val="B4B4B4"/>
+              <a:rPr sz="2000" b="0" i="1">
+                <a:solidFill>
+                  <a:srgbClr val="828282"/>
                 </a:solidFill>
                 <a:latin typeface="Arial"/>
               </a:rPr>
-              <a:t>Ounaru Koga Umareta</a:t>
+              <a:t>Que nos campos a guardar seu rebanho, afinal</a:t>
             </a:r>
           </a:p>
         </p:txBody>
@@ -4827,8 +4477,8 @@
         </p:nvSpPr>
         <p:spPr>
           <a:xfrm>
-            <a:off x="594360" y="4672584"/>
-            <a:ext cx="11002975" cy="347472"/>
+            <a:off x="640080" y="4896612"/>
+            <a:ext cx="10911535" cy="310896"/>
           </a:xfrm>
           <a:prstGeom prst="rect">
             <a:avLst/>
@@ -4845,11 +4495,11 @@
             <a:r>
               <a:rPr sz="2000" b="0" i="1">
                 <a:solidFill>
-                  <a:srgbClr val="8C8C8C"/>
+                  <a:srgbClr val="828282"/>
                 </a:solidFill>
                 <a:latin typeface="Arial"/>
               </a:rPr>
-              <a:t/>
+              <a:t>Suportavam, da noite, o frio também</a:t>
             </a:r>
           </a:p>
         </p:txBody>
@@ -4888,8 +4538,8 @@
         </p:nvSpPr>
         <p:spPr>
           <a:xfrm>
-            <a:off x="594360" y="1837944"/>
-            <a:ext cx="11002975" cy="685800"/>
+            <a:off x="640080" y="1650492"/>
+            <a:ext cx="10911535" cy="731520"/>
           </a:xfrm>
           <a:prstGeom prst="rect">
             <a:avLst/>
@@ -4904,7 +4554,7 @@
           <a:p>
             <a:pPr algn="ctr"/>
             <a:r>
-              <a:rPr sz="3017" b="1" i="0">
+              <a:rPr sz="3200" b="1" i="0">
                 <a:solidFill>
                   <a:srgbClr val="FFFFFF"/>
                 </a:solidFill>
@@ -4923,8 +4573,8 @@
         </p:nvSpPr>
         <p:spPr>
           <a:xfrm>
-            <a:off x="594360" y="2560320"/>
-            <a:ext cx="11002975" cy="384048"/>
+            <a:off x="640080" y="2418588"/>
+            <a:ext cx="10911535" cy="365760"/>
           </a:xfrm>
           <a:prstGeom prst="rect">
             <a:avLst/>
@@ -4939,9 +4589,9 @@
           <a:p>
             <a:pPr algn="ctr"/>
             <a:r>
-              <a:rPr sz="1800" b="0" i="1">
-                <a:solidFill>
-                  <a:srgbClr val="B4B4B4"/>
+              <a:rPr sz="2200" b="0" i="1">
+                <a:solidFill>
+                  <a:srgbClr val="AAAAAA"/>
                 </a:solidFill>
                 <a:latin typeface="Arial"/>
               </a:rPr>
@@ -4958,8 +4608,8 @@
         </p:nvSpPr>
         <p:spPr>
           <a:xfrm>
-            <a:off x="594360" y="2980944"/>
-            <a:ext cx="11002975" cy="347472"/>
+            <a:off x="640080" y="2985516"/>
+            <a:ext cx="10911535" cy="731520"/>
           </a:xfrm>
           <a:prstGeom prst="rect">
             <a:avLst/>
@@ -4974,13 +4624,13 @@
           <a:p>
             <a:pPr algn="ctr"/>
             <a:r>
-              <a:rPr sz="2000" b="0" i="1">
-                <a:solidFill>
-                  <a:srgbClr val="8C8C8C"/>
+              <a:rPr sz="2500" b="1" i="0">
+                <a:solidFill>
+                  <a:srgbClr val="FFFFFF"/>
                 </a:solidFill>
                 <a:latin typeface="Arial"/>
               </a:rPr>
-              <a:t/>
+              <a:t>天と地を造った神  --&gt;          その血潮は罪のあがない (Build up)</a:t>
             </a:r>
           </a:p>
         </p:txBody>
@@ -4993,8 +4643,8 @@
         </p:nvSpPr>
         <p:spPr>
           <a:xfrm>
-            <a:off x="594360" y="3529584"/>
-            <a:ext cx="11002975" cy="685800"/>
+            <a:off x="640080" y="3753612"/>
+            <a:ext cx="10911535" cy="365760"/>
           </a:xfrm>
           <a:prstGeom prst="rect">
             <a:avLst/>
@@ -5009,13 +4659,13 @@
           <a:p>
             <a:pPr algn="ctr"/>
             <a:r>
-              <a:rPr sz="2346" b="1" i="0">
-                <a:solidFill>
-                  <a:srgbClr val="FFFFFF"/>
+              <a:rPr sz="2000" b="0" i="1">
+                <a:solidFill>
+                  <a:srgbClr val="AAAAAA"/>
                 </a:solidFill>
                 <a:latin typeface="Arial"/>
               </a:rPr>
-              <a:t>天と地を造った神  --&gt;          その血潮は罪のあがない (Build up)</a:t>
+              <a:t>Tento Chiwo Tsukutta Kami     Sono Chishioha  Tsumino Aganai</a:t>
             </a:r>
           </a:p>
         </p:txBody>
@@ -5028,8 +4678,8 @@
         </p:nvSpPr>
         <p:spPr>
           <a:xfrm>
-            <a:off x="594360" y="4251960"/>
-            <a:ext cx="11002975" cy="384048"/>
+            <a:off x="640080" y="4530852"/>
+            <a:ext cx="10911535" cy="310896"/>
           </a:xfrm>
           <a:prstGeom prst="rect">
             <a:avLst/>
@@ -5044,13 +4694,13 @@
           <a:p>
             <a:pPr algn="ctr"/>
             <a:r>
-              <a:rPr sz="1679" b="0" i="1">
-                <a:solidFill>
-                  <a:srgbClr val="B4B4B4"/>
+              <a:rPr sz="2000" b="0" i="1">
+                <a:solidFill>
+                  <a:srgbClr val="828282"/>
                 </a:solidFill>
                 <a:latin typeface="Arial"/>
               </a:rPr>
-              <a:t>Tento Chiwo Tsukutta Kami     Sono Chishioha  Tsumino Aganai</a:t>
+              <a:t>Eis que um anjo proclamou o primeiro Natal</a:t>
             </a:r>
           </a:p>
         </p:txBody>
@@ -5063,8 +4713,8 @@
         </p:nvSpPr>
         <p:spPr>
           <a:xfrm>
-            <a:off x="594360" y="4672584"/>
-            <a:ext cx="11002975" cy="347472"/>
+            <a:off x="640080" y="4896612"/>
+            <a:ext cx="10911535" cy="310896"/>
           </a:xfrm>
           <a:prstGeom prst="rect">
             <a:avLst/>
@@ -5081,11 +4731,11 @@
             <a:r>
               <a:rPr sz="2000" b="0" i="1">
                 <a:solidFill>
-                  <a:srgbClr val="8C8C8C"/>
+                  <a:srgbClr val="828282"/>
                 </a:solidFill>
                 <a:latin typeface="Arial"/>
               </a:rPr>
-              <a:t/>
+              <a:t>A uns pobres pastores ao pé de Belém</a:t>
             </a:r>
           </a:p>
         </p:txBody>
@@ -5124,8 +4774,8 @@
         </p:nvSpPr>
         <p:spPr>
           <a:xfrm>
-            <a:off x="594360" y="1837944"/>
-            <a:ext cx="11002975" cy="685800"/>
+            <a:off x="640080" y="1650492"/>
+            <a:ext cx="10911535" cy="731520"/>
           </a:xfrm>
           <a:prstGeom prst="rect">
             <a:avLst/>
@@ -5140,7 +4790,7 @@
           <a:p>
             <a:pPr algn="ctr"/>
             <a:r>
-              <a:rPr sz="4400" b="1" i="0">
+              <a:rPr sz="4800" b="1" i="0">
                 <a:solidFill>
                   <a:srgbClr val="FFFFFF"/>
                 </a:solidFill>
@@ -5159,8 +4809,8 @@
         </p:nvSpPr>
         <p:spPr>
           <a:xfrm>
-            <a:off x="594360" y="2560320"/>
-            <a:ext cx="11002975" cy="384048"/>
+            <a:off x="640080" y="2418588"/>
+            <a:ext cx="10911535" cy="365760"/>
           </a:xfrm>
           <a:prstGeom prst="rect">
             <a:avLst/>
@@ -5177,7 +4827,7 @@
             <a:r>
               <a:rPr sz="2400" b="0" i="1">
                 <a:solidFill>
-                  <a:srgbClr val="B4B4B4"/>
+                  <a:srgbClr val="AAAAAA"/>
                 </a:solidFill>
                 <a:latin typeface="Arial"/>
               </a:rPr>
@@ -5194,8 +4844,8 @@
         </p:nvSpPr>
         <p:spPr>
           <a:xfrm>
-            <a:off x="594360" y="2980944"/>
-            <a:ext cx="11002975" cy="347472"/>
+            <a:off x="640080" y="2985516"/>
+            <a:ext cx="10911535" cy="731520"/>
           </a:xfrm>
           <a:prstGeom prst="rect">
             <a:avLst/>
@@ -5210,13 +4860,13 @@
           <a:p>
             <a:pPr algn="ctr"/>
             <a:r>
-              <a:rPr sz="2000" b="0" i="1">
-                <a:solidFill>
-                  <a:srgbClr val="8C8C8C"/>
+              <a:rPr sz="4800" b="1" i="0">
+                <a:solidFill>
+                  <a:srgbClr val="FFFFFF"/>
                 </a:solidFill>
                 <a:latin typeface="Arial"/>
               </a:rPr>
-              <a:t/>
+              <a:t>王なる子が生まれた</a:t>
             </a:r>
           </a:p>
         </p:txBody>
@@ -5229,8 +4879,8 @@
         </p:nvSpPr>
         <p:spPr>
           <a:xfrm>
-            <a:off x="594360" y="3529584"/>
-            <a:ext cx="11002975" cy="685800"/>
+            <a:off x="640080" y="3753612"/>
+            <a:ext cx="10911535" cy="365760"/>
           </a:xfrm>
           <a:prstGeom prst="rect">
             <a:avLst/>
@@ -5245,13 +4895,13 @@
           <a:p>
             <a:pPr algn="ctr"/>
             <a:r>
-              <a:rPr sz="4400" b="1" i="0">
-                <a:solidFill>
-                  <a:srgbClr val="FFFFFF"/>
+              <a:rPr sz="2400" b="0" i="1">
+                <a:solidFill>
+                  <a:srgbClr val="AAAAAA"/>
                 </a:solidFill>
                 <a:latin typeface="Arial"/>
               </a:rPr>
-              <a:t>王なる子が生まれた</a:t>
+              <a:t>Ounaru Koga Umareta</a:t>
             </a:r>
           </a:p>
         </p:txBody>
@@ -5264,8 +4914,8 @@
         </p:nvSpPr>
         <p:spPr>
           <a:xfrm>
-            <a:off x="594360" y="4251960"/>
-            <a:ext cx="11002975" cy="384048"/>
+            <a:off x="640080" y="4530852"/>
+            <a:ext cx="10911535" cy="310896"/>
           </a:xfrm>
           <a:prstGeom prst="rect">
             <a:avLst/>
@@ -5280,13 +4930,13 @@
           <a:p>
             <a:pPr algn="ctr"/>
             <a:r>
-              <a:rPr sz="2400" b="0" i="1">
-                <a:solidFill>
-                  <a:srgbClr val="B4B4B4"/>
+              <a:rPr sz="2000" b="0" i="1">
+                <a:solidFill>
+                  <a:srgbClr val="828282"/>
                 </a:solidFill>
                 <a:latin typeface="Arial"/>
               </a:rPr>
-              <a:t>Ounaru Koga Umareta</a:t>
+              <a:t>Que nos campos a guardar seu rebanho, afinal</a:t>
             </a:r>
           </a:p>
         </p:txBody>
@@ -5299,8 +4949,8 @@
         </p:nvSpPr>
         <p:spPr>
           <a:xfrm>
-            <a:off x="594360" y="4672584"/>
-            <a:ext cx="11002975" cy="347472"/>
+            <a:off x="640080" y="4896612"/>
+            <a:ext cx="10911535" cy="310896"/>
           </a:xfrm>
           <a:prstGeom prst="rect">
             <a:avLst/>
@@ -5317,11 +4967,11 @@
             <a:r>
               <a:rPr sz="2000" b="0" i="1">
                 <a:solidFill>
-                  <a:srgbClr val="8C8C8C"/>
+                  <a:srgbClr val="828282"/>
                 </a:solidFill>
                 <a:latin typeface="Arial"/>
               </a:rPr>
-              <a:t/>
+              <a:t>Suportavam, da noite, o frio também</a:t>
             </a:r>
           </a:p>
         </p:txBody>

--- a/output_pptx/The_First_Noel.pptx
+++ b/output_pptx/The_First_Noel.pptx
@@ -3176,6 +3176,76 @@
           </a:p>
         </p:txBody>
       </p:sp>
+      <p:sp>
+        <p:nvSpPr>
+          <p:cNvPr id="4" name="TextBox 3"/>
+          <p:cNvSpPr txBox="1"/>
+          <p:nvPr/>
+        </p:nvSpPr>
+        <p:spPr>
+          <a:xfrm>
+            <a:off x="640080" y="4128516"/>
+            <a:ext cx="10911535" cy="310896"/>
+          </a:xfrm>
+          <a:prstGeom prst="rect">
+            <a:avLst/>
+          </a:prstGeom>
+          <a:noFill/>
+        </p:spPr>
+        <p:txBody>
+          <a:bodyPr wrap="square">
+            <a:spAutoFit/>
+          </a:bodyPr>
+          <a:lstStyle/>
+          <a:p>
+            <a:pPr algn="ctr"/>
+            <a:r>
+              <a:rPr sz="2000" b="0" i="0">
+                <a:solidFill>
+                  <a:srgbClr val="828282"/>
+                </a:solidFill>
+                <a:latin typeface="Arial"/>
+              </a:rPr>
+              <a:t>見よ、ある天使が最初のクリスマスを告げ知らせた</a:t>
+            </a:r>
+          </a:p>
+        </p:txBody>
+      </p:sp>
+      <p:sp>
+        <p:nvSpPr>
+          <p:cNvPr id="5" name="TextBox 4"/>
+          <p:cNvSpPr txBox="1"/>
+          <p:nvPr/>
+        </p:nvSpPr>
+        <p:spPr>
+          <a:xfrm>
+            <a:off x="640080" y="4494276"/>
+            <a:ext cx="10911535" cy="310896"/>
+          </a:xfrm>
+          <a:prstGeom prst="rect">
+            <a:avLst/>
+          </a:prstGeom>
+          <a:noFill/>
+        </p:spPr>
+        <p:txBody>
+          <a:bodyPr wrap="square">
+            <a:spAutoFit/>
+          </a:bodyPr>
+          <a:lstStyle/>
+          <a:p>
+            <a:pPr algn="ctr"/>
+            <a:r>
+              <a:rPr sz="2000" b="0" i="0">
+                <a:solidFill>
+                  <a:srgbClr val="828282"/>
+                </a:solidFill>
+                <a:latin typeface="Arial"/>
+              </a:rPr>
+              <a:t>ベツレヘムのそばにいた貧しい羊飼いたちに</a:t>
+            </a:r>
+          </a:p>
+        </p:txBody>
+      </p:sp>
     </p:spTree>
   </p:cSld>
   <p:clrMapOvr>
@@ -3272,6 +3342,76 @@
           </a:p>
         </p:txBody>
       </p:sp>
+      <p:sp>
+        <p:nvSpPr>
+          <p:cNvPr id="4" name="TextBox 3"/>
+          <p:cNvSpPr txBox="1"/>
+          <p:nvPr/>
+        </p:nvSpPr>
+        <p:spPr>
+          <a:xfrm>
+            <a:off x="640080" y="4128516"/>
+            <a:ext cx="10911535" cy="310896"/>
+          </a:xfrm>
+          <a:prstGeom prst="rect">
+            <a:avLst/>
+          </a:prstGeom>
+          <a:noFill/>
+        </p:spPr>
+        <p:txBody>
+          <a:bodyPr wrap="square">
+            <a:spAutoFit/>
+          </a:bodyPr>
+          <a:lstStyle/>
+          <a:p>
+            <a:pPr algn="ctr"/>
+            <a:r>
+              <a:rPr sz="2000" b="0" i="0">
+                <a:solidFill>
+                  <a:srgbClr val="828282"/>
+                </a:solidFill>
+                <a:latin typeface="Arial"/>
+              </a:rPr>
+              <a:t>そして東方に奇しき輝きが輝いた</a:t>
+            </a:r>
+          </a:p>
+        </p:txBody>
+      </p:sp>
+      <p:sp>
+        <p:nvSpPr>
+          <p:cNvPr id="5" name="TextBox 4"/>
+          <p:cNvSpPr txBox="1"/>
+          <p:nvPr/>
+        </p:nvSpPr>
+        <p:spPr>
+          <a:xfrm>
+            <a:off x="640080" y="4494276"/>
+            <a:ext cx="10911535" cy="310896"/>
+          </a:xfrm>
+          <a:prstGeom prst="rect">
+            <a:avLst/>
+          </a:prstGeom>
+          <a:noFill/>
+        </p:spPr>
+        <p:txBody>
+          <a:bodyPr wrap="square">
+            <a:spAutoFit/>
+          </a:bodyPr>
+          <a:lstStyle/>
+          <a:p>
+            <a:pPr algn="ctr"/>
+            <a:r>
+              <a:rPr sz="2000" b="0" i="0">
+                <a:solidFill>
+                  <a:srgbClr val="828282"/>
+                </a:solidFill>
+                <a:latin typeface="Arial"/>
+              </a:rPr>
+              <a:t>地上に強き光が来た、それは天から降りた</a:t>
+            </a:r>
+          </a:p>
+        </p:txBody>
+      </p:sp>
     </p:spTree>
   </p:cSld>
   <p:clrMapOvr>
@@ -3368,6 +3508,76 @@
           </a:p>
         </p:txBody>
       </p:sp>
+      <p:sp>
+        <p:nvSpPr>
+          <p:cNvPr id="4" name="TextBox 3"/>
+          <p:cNvSpPr txBox="1"/>
+          <p:nvPr/>
+        </p:nvSpPr>
+        <p:spPr>
+          <a:xfrm>
+            <a:off x="640080" y="4128516"/>
+            <a:ext cx="10911535" cy="310896"/>
+          </a:xfrm>
+          <a:prstGeom prst="rect">
+            <a:avLst/>
+          </a:prstGeom>
+          <a:noFill/>
+        </p:spPr>
+        <p:txBody>
+          <a:bodyPr wrap="square">
+            <a:spAutoFit/>
+          </a:bodyPr>
+          <a:lstStyle/>
+          <a:p>
+            <a:pPr algn="ctr"/>
+            <a:r>
+              <a:rPr sz="2000" b="0" i="0">
+                <a:solidFill>
+                  <a:srgbClr val="828282"/>
+                </a:solidFill>
+                <a:latin typeface="Arial"/>
+              </a:rPr>
+              <a:t>多くの夜、今なお、輝く栄光のうちに</a:t>
+            </a:r>
+          </a:p>
+        </p:txBody>
+      </p:sp>
+      <p:sp>
+        <p:nvSpPr>
+          <p:cNvPr id="5" name="TextBox 4"/>
+          <p:cNvSpPr txBox="1"/>
+          <p:nvPr/>
+        </p:nvSpPr>
+        <p:spPr>
+          <a:xfrm>
+            <a:off x="640080" y="4494276"/>
+            <a:ext cx="10911535" cy="310896"/>
+          </a:xfrm>
+          <a:prstGeom prst="rect">
+            <a:avLst/>
+          </a:prstGeom>
+          <a:noFill/>
+        </p:spPr>
+        <p:txBody>
+          <a:bodyPr wrap="square">
+            <a:spAutoFit/>
+          </a:bodyPr>
+          <a:lstStyle/>
+          <a:p>
+            <a:pPr algn="ctr"/>
+            <a:r>
+              <a:rPr sz="2000" b="0" i="0">
+                <a:solidFill>
+                  <a:srgbClr val="828282"/>
+                </a:solidFill>
+                <a:latin typeface="Arial"/>
+              </a:rPr>
+              <a:t>クリスマス！クリスマス！クリスマス！クリスマス！</a:t>
+            </a:r>
+          </a:p>
+        </p:txBody>
+      </p:sp>
     </p:spTree>
   </p:cSld>
   <p:clrMapOvr>
@@ -3464,6 +3674,76 @@
           </a:p>
         </p:txBody>
       </p:sp>
+      <p:sp>
+        <p:nvSpPr>
+          <p:cNvPr id="4" name="TextBox 3"/>
+          <p:cNvSpPr txBox="1"/>
+          <p:nvPr/>
+        </p:nvSpPr>
+        <p:spPr>
+          <a:xfrm>
+            <a:off x="640080" y="4128516"/>
+            <a:ext cx="10911535" cy="310896"/>
+          </a:xfrm>
+          <a:prstGeom prst="rect">
+            <a:avLst/>
+          </a:prstGeom>
+          <a:noFill/>
+        </p:spPr>
+        <p:txBody>
+          <a:bodyPr wrap="square">
+            <a:spAutoFit/>
+          </a:bodyPr>
+          <a:lstStyle/>
+          <a:p>
+            <a:pPr algn="ctr"/>
+            <a:r>
+              <a:rPr sz="2000" b="0" i="0">
+                <a:solidFill>
+                  <a:srgbClr val="828282"/>
+                </a:solidFill>
+                <a:latin typeface="Arial"/>
+              </a:rPr>
+              <a:t>野原で群れを守っていた彼らに、結局のところ</a:t>
+            </a:r>
+          </a:p>
+        </p:txBody>
+      </p:sp>
+      <p:sp>
+        <p:nvSpPr>
+          <p:cNvPr id="5" name="TextBox 4"/>
+          <p:cNvSpPr txBox="1"/>
+          <p:nvPr/>
+        </p:nvSpPr>
+        <p:spPr>
+          <a:xfrm>
+            <a:off x="640080" y="4494276"/>
+            <a:ext cx="10911535" cy="310896"/>
+          </a:xfrm>
+          <a:prstGeom prst="rect">
+            <a:avLst/>
+          </a:prstGeom>
+          <a:noFill/>
+        </p:spPr>
+        <p:txBody>
+          <a:bodyPr wrap="square">
+            <a:spAutoFit/>
+          </a:bodyPr>
+          <a:lstStyle/>
+          <a:p>
+            <a:pPr algn="ctr"/>
+            <a:r>
+              <a:rPr sz="2000" b="0" i="0">
+                <a:solidFill>
+                  <a:srgbClr val="828282"/>
+                </a:solidFill>
+                <a:latin typeface="Arial"/>
+              </a:rPr>
+              <a:t>夜の寒さにも耐えていた</a:t>
+            </a:r>
+          </a:p>
+        </p:txBody>
+      </p:sp>
     </p:spTree>
   </p:cSld>
   <p:clrMapOvr>
@@ -3556,6 +3836,76 @@
                 <a:latin typeface="Arial"/>
               </a:rPr>
               <a:t>É vindo ao mundo o Rei Divinal!</a:t>
+            </a:r>
+          </a:p>
+        </p:txBody>
+      </p:sp>
+      <p:sp>
+        <p:nvSpPr>
+          <p:cNvPr id="4" name="TextBox 3"/>
+          <p:cNvSpPr txBox="1"/>
+          <p:nvPr/>
+        </p:nvSpPr>
+        <p:spPr>
+          <a:xfrm>
+            <a:off x="640080" y="4128516"/>
+            <a:ext cx="10911535" cy="310896"/>
+          </a:xfrm>
+          <a:prstGeom prst="rect">
+            <a:avLst/>
+          </a:prstGeom>
+          <a:noFill/>
+        </p:spPr>
+        <p:txBody>
+          <a:bodyPr wrap="square">
+            <a:spAutoFit/>
+          </a:bodyPr>
+          <a:lstStyle/>
+          <a:p>
+            <a:pPr algn="ctr"/>
+            <a:r>
+              <a:rPr sz="2000" b="0" i="0">
+                <a:solidFill>
+                  <a:srgbClr val="828282"/>
+                </a:solidFill>
+                <a:latin typeface="Arial"/>
+              </a:rPr>
+              <a:t>クリスマス！クリスマス！クリスマス！クリスマス！</a:t>
+            </a:r>
+          </a:p>
+        </p:txBody>
+      </p:sp>
+      <p:sp>
+        <p:nvSpPr>
+          <p:cNvPr id="5" name="TextBox 4"/>
+          <p:cNvSpPr txBox="1"/>
+          <p:nvPr/>
+        </p:nvSpPr>
+        <p:spPr>
+          <a:xfrm>
+            <a:off x="640080" y="4494276"/>
+            <a:ext cx="10911535" cy="310896"/>
+          </a:xfrm>
+          <a:prstGeom prst="rect">
+            <a:avLst/>
+          </a:prstGeom>
+          <a:noFill/>
+        </p:spPr>
+        <p:txBody>
+          <a:bodyPr wrap="square">
+            <a:spAutoFit/>
+          </a:bodyPr>
+          <a:lstStyle/>
+          <a:p>
+            <a:pPr algn="ctr"/>
+            <a:r>
+              <a:rPr sz="2000" b="0" i="0">
+                <a:solidFill>
+                  <a:srgbClr val="828282"/>
+                </a:solidFill>
+                <a:latin typeface="Arial"/>
+              </a:rPr>
+              <a:t>神の王が世に来たのだ！</a:t>
             </a:r>
           </a:p>
         </p:txBody>
